--- a/11а клас/РС/7. Свързване на приложения с бази от данни/08. CRUD приложение без ORM.pptx
+++ b/11а клас/РС/7. Свързване на приложения с бази от данни/08. CRUD приложение без ORM.pptx
@@ -22,6 +22,8 @@
     <p:sldId id="641" r:id="rId13"/>
     <p:sldId id="642" r:id="rId14"/>
     <p:sldId id="572" r:id="rId15"/>
+    <p:sldId id="643" r:id="rId23"/>
+    <p:sldId id="644" r:id="rId24"/>
   </p:sldIdLst>
   <p:sldSz cx="12192000" cy="6858000"/>
   <p:notesSz cx="6858000" cy="9144000"/>
@@ -1127,7 +1129,9 @@
           <a:bodyPr/>
           <a:lstStyle/>
           <a:p>
-            <a:endParaRPr lang="en-US" dirty="0"/>
+            <a:r>
+              <a:t>ТРИСЛОЙНА: Presentation &lt;- Business &lt;- Data &lt;- DB. Всеки слой знае само своето!</a:t>
+            </a:r>
           </a:p>
         </p:txBody>
       </p:sp>
@@ -1236,6 +1240,286 @@
         <p14:creationId xmlns:p14="http://schemas.microsoft.com/office/powerpoint/2010/main" val="3313487740"/>
       </p:ext>
     </p:extLst>
+  </p:cSld>
+  <p:clrMapOvr>
+    <a:masterClrMapping/>
+  </p:clrMapOvr>
+</p:notes>
+</file>
+
+<file path=ppt/notesSlides/notesSlide10.xml><?xml version="1.0" encoding="utf-8"?>
+<p:notes xmlns:a="http://schemas.openxmlformats.org/drawingml/2006/main" xmlns:p="http://schemas.openxmlformats.org/presentationml/2006/main" xmlns:r="http://schemas.openxmlformats.org/officeDocument/2006/relationships">
+  <p:cSld>
+    <p:spTree>
+      <p:nvGrpSpPr>
+        <p:cNvPr id="1" name=""/>
+        <p:cNvGrpSpPr/>
+        <p:nvPr/>
+      </p:nvGrpSpPr>
+      <p:grpSpPr>
+        <a:xfrm>
+          <a:off x="0" y="0"/>
+          <a:ext cx="0" cy="0"/>
+          <a:chOff x="0" y="0"/>
+          <a:chExt cx="0" cy="0"/>
+        </a:xfrm>
+      </p:grpSpPr>
+      <p:sp>
+        <p:nvSpPr>
+          <p:cNvPr id="2" name="Slide Image Placeholder 1"/>
+          <p:cNvSpPr>
+            <a:spLocks noGrp="1"/>
+          </p:cNvSpPr>
+          <p:nvPr>
+            <p:ph type="sldImg" idx="2"/>
+          </p:nvPr>
+        </p:nvSpPr>
+        <p:spPr/>
+      </p:sp>
+      <p:sp>
+        <p:nvSpPr>
+          <p:cNvPr id="3" name="Notes Placeholder 2"/>
+          <p:cNvSpPr>
+            <a:spLocks noGrp="1"/>
+          </p:cNvSpPr>
+          <p:nvPr>
+            <p:ph type="body" idx="3" sz="quarter"/>
+          </p:nvPr>
+        </p:nvSpPr>
+        <p:spPr/>
+        <p:txBody>
+          <a:bodyPr/>
+          <a:lstStyle/>
+          <a:p>
+            <a:r>
+              <a:t>до/while + switch: класически конзолен UI патърн.</a:t>
+            </a:r>
+          </a:p>
+        </p:txBody>
+      </p:sp>
+      <p:sp>
+        <p:nvSpPr>
+          <p:cNvPr id="4" name="Slide Number Placeholder 3"/>
+          <p:cNvSpPr>
+            <a:spLocks noGrp="1"/>
+          </p:cNvSpPr>
+          <p:nvPr>
+            <p:ph type="sldNum" idx="5" sz="quarter"/>
+          </p:nvPr>
+        </p:nvSpPr>
+        <p:spPr/>
+      </p:sp>
+    </p:spTree>
+  </p:cSld>
+  <p:clrMapOvr>
+    <a:masterClrMapping/>
+  </p:clrMapOvr>
+</p:notes>
+</file>
+
+<file path=ppt/notesSlides/notesSlide11.xml><?xml version="1.0" encoding="utf-8"?>
+<p:notes xmlns:a="http://schemas.openxmlformats.org/drawingml/2006/main" xmlns:p="http://schemas.openxmlformats.org/presentationml/2006/main" xmlns:r="http://schemas.openxmlformats.org/officeDocument/2006/relationships">
+  <p:cSld>
+    <p:spTree>
+      <p:nvGrpSpPr>
+        <p:cNvPr id="1" name=""/>
+        <p:cNvGrpSpPr/>
+        <p:nvPr/>
+      </p:nvGrpSpPr>
+      <p:grpSpPr>
+        <a:xfrm>
+          <a:off x="0" y="0"/>
+          <a:ext cx="0" cy="0"/>
+          <a:chOff x="0" y="0"/>
+          <a:chExt cx="0" cy="0"/>
+        </a:xfrm>
+      </p:grpSpPr>
+      <p:sp>
+        <p:nvSpPr>
+          <p:cNvPr id="2" name="Slide Image Placeholder 1"/>
+          <p:cNvSpPr>
+            <a:spLocks noGrp="1"/>
+          </p:cNvSpPr>
+          <p:nvPr>
+            <p:ph type="sldImg" idx="2"/>
+          </p:nvPr>
+        </p:nvSpPr>
+        <p:spPr/>
+      </p:sp>
+      <p:sp>
+        <p:nvSpPr>
+          <p:cNvPr id="3" name="Notes Placeholder 2"/>
+          <p:cNvSpPr>
+            <a:spLocks noGrp="1"/>
+          </p:cNvSpPr>
+          <p:nvPr>
+            <p:ph type="body" idx="3" sz="quarter"/>
+          </p:nvPr>
+        </p:nvSpPr>
+        <p:spPr/>
+        <p:txBody>
+          <a:bodyPr/>
+          <a:lstStyle/>
+          <a:p>
+            <a:r>
+              <a:t>Накарайте учениците да тестват CRUD. Проверете в SSMS.</a:t>
+            </a:r>
+          </a:p>
+        </p:txBody>
+      </p:sp>
+      <p:sp>
+        <p:nvSpPr>
+          <p:cNvPr id="4" name="Slide Number Placeholder 3"/>
+          <p:cNvSpPr>
+            <a:spLocks noGrp="1"/>
+          </p:cNvSpPr>
+          <p:nvPr>
+            <p:ph type="sldNum" idx="5" sz="quarter"/>
+          </p:nvPr>
+        </p:nvSpPr>
+        <p:spPr/>
+      </p:sp>
+    </p:spTree>
+  </p:cSld>
+  <p:clrMapOvr>
+    <a:masterClrMapping/>
+  </p:clrMapOvr>
+</p:notes>
+</file>
+
+<file path=ppt/notesSlides/notesSlide12.xml><?xml version="1.0" encoding="utf-8"?>
+<p:notes xmlns:a="http://schemas.openxmlformats.org/drawingml/2006/main" xmlns:p="http://schemas.openxmlformats.org/presentationml/2006/main" xmlns:r="http://schemas.openxmlformats.org/officeDocument/2006/relationships">
+  <p:cSld>
+    <p:spTree>
+      <p:nvGrpSpPr>
+        <p:cNvPr id="1" name=""/>
+        <p:cNvGrpSpPr/>
+        <p:nvPr/>
+      </p:nvGrpSpPr>
+      <p:grpSpPr>
+        <a:xfrm>
+          <a:off x="0" y="0"/>
+          <a:ext cx="0" cy="0"/>
+          <a:chOff x="0" y="0"/>
+          <a:chExt cx="0" cy="0"/>
+        </a:xfrm>
+      </p:grpSpPr>
+      <p:sp>
+        <p:nvSpPr>
+          <p:cNvPr id="2" name="Slide Image Placeholder 1"/>
+          <p:cNvSpPr>
+            <a:spLocks noGrp="1"/>
+          </p:cNvSpPr>
+          <p:nvPr>
+            <p:ph type="sldImg" idx="2"/>
+          </p:nvPr>
+        </p:nvSpPr>
+        <p:spPr/>
+      </p:sp>
+      <p:sp>
+        <p:nvSpPr>
+          <p:cNvPr id="3" name="Notes Placeholder 2"/>
+          <p:cNvSpPr>
+            <a:spLocks noGrp="1"/>
+          </p:cNvSpPr>
+          <p:nvPr>
+            <p:ph type="body" idx="3" sz="quarter"/>
+          </p:nvPr>
+        </p:nvSpPr>
+        <p:spPr/>
+        <p:txBody>
+          <a:bodyPr/>
+          <a:lstStyle/>
+          <a:p>
+            <a:r>
+              <a:t>Нарисувайте 3 хоризонтални ленти и стрелките.</a:t>
+            </a:r>
+          </a:p>
+        </p:txBody>
+      </p:sp>
+      <p:sp>
+        <p:nvSpPr>
+          <p:cNvPr id="4" name="Slide Number Placeholder 3"/>
+          <p:cNvSpPr>
+            <a:spLocks noGrp="1"/>
+          </p:cNvSpPr>
+          <p:nvPr>
+            <p:ph type="sldNum" idx="5" sz="quarter"/>
+          </p:nvPr>
+        </p:nvSpPr>
+        <p:spPr/>
+      </p:sp>
+    </p:spTree>
+  </p:cSld>
+  <p:clrMapOvr>
+    <a:masterClrMapping/>
+  </p:clrMapOvr>
+</p:notes>
+</file>
+
+<file path=ppt/notesSlides/notesSlide13.xml><?xml version="1.0" encoding="utf-8"?>
+<p:notes xmlns:a="http://schemas.openxmlformats.org/drawingml/2006/main" xmlns:p="http://schemas.openxmlformats.org/presentationml/2006/main" xmlns:r="http://schemas.openxmlformats.org/officeDocument/2006/relationships">
+  <p:cSld>
+    <p:spTree>
+      <p:nvGrpSpPr>
+        <p:cNvPr id="1" name=""/>
+        <p:cNvGrpSpPr/>
+        <p:nvPr/>
+      </p:nvGrpSpPr>
+      <p:grpSpPr>
+        <a:xfrm>
+          <a:off x="0" y="0"/>
+          <a:ext cx="0" cy="0"/>
+          <a:chOff x="0" y="0"/>
+          <a:chExt cx="0" cy="0"/>
+        </a:xfrm>
+      </p:grpSpPr>
+      <p:sp>
+        <p:nvSpPr>
+          <p:cNvPr id="2" name="Slide Image Placeholder 1"/>
+          <p:cNvSpPr>
+            <a:spLocks noGrp="1"/>
+          </p:cNvSpPr>
+          <p:nvPr>
+            <p:ph type="sldImg" idx="2"/>
+          </p:nvPr>
+        </p:nvSpPr>
+        <p:spPr/>
+      </p:sp>
+      <p:sp>
+        <p:nvSpPr>
+          <p:cNvPr id="3" name="Notes Placeholder 2"/>
+          <p:cNvSpPr>
+            <a:spLocks noGrp="1"/>
+          </p:cNvSpPr>
+          <p:nvPr>
+            <p:ph type="body" idx="3" sz="quarter"/>
+          </p:nvPr>
+        </p:nvSpPr>
+        <p:spPr/>
+        <p:txBody>
+          <a:bodyPr/>
+          <a:lstStyle/>
+          <a:p>
+            <a:r>
+              <a:t>Тествайте всичките 5 операции. Проверете в SSMS.</a:t>
+            </a:r>
+          </a:p>
+        </p:txBody>
+      </p:sp>
+      <p:sp>
+        <p:nvSpPr>
+          <p:cNvPr id="4" name="Slide Number Placeholder 3"/>
+          <p:cNvSpPr>
+            <a:spLocks noGrp="1"/>
+          </p:cNvSpPr>
+          <p:nvPr>
+            <p:ph type="sldNum" idx="5" sz="quarter"/>
+          </p:nvPr>
+        </p:nvSpPr>
+        <p:spPr/>
+      </p:sp>
+    </p:spTree>
   </p:cSld>
   <p:clrMapOvr>
     <a:masterClrMapping/>
@@ -1287,7 +1571,9 @@
           <a:bodyPr/>
           <a:lstStyle/>
           <a:p>
-            <a:endParaRPr lang="en-US" dirty="0"/>
+            <a:r>
+              <a:t>IDENTITY(100,1): стартира от 100. DECIMAL(10,2): макс 99999999.99.</a:t>
+            </a:r>
           </a:p>
         </p:txBody>
       </p:sp>
@@ -1447,7 +1733,9 @@
           <a:bodyPr/>
           <a:lstStyle/>
           <a:p>
-            <a:endParaRPr lang="en-US" dirty="0"/>
+            <a:r>
+              <a:t>Статичен клас. GetConnection() връща НОВА SqlConnection всеки път.</a:t>
+            </a:r>
           </a:p>
         </p:txBody>
       </p:sp>
@@ -1607,7 +1895,9 @@
           <a:bodyPr/>
           <a:lstStyle/>
           <a:p>
-            <a:endParaRPr lang="en-US" dirty="0"/>
+            <a:r>
+              <a:t>GetAll: SELECT*. ExecuteReader + while(Read). Get: SELECT WHERE @id. Add: ExecuteNonQuery.</a:t>
+            </a:r>
           </a:p>
         </p:txBody>
       </p:sp>
@@ -1767,7 +2057,9 @@
           <a:bodyPr/>
           <a:lstStyle/>
           <a:p>
-            <a:endParaRPr lang="en-US" dirty="0"/>
+            <a:r>
+              <a:t>UPDATE SET Name=@name... WHERE Id=@id. Delete: DELETE WHERE @id. Проверявайте return на ExecuteNonQuery.</a:t>
+            </a:r>
           </a:p>
         </p:txBody>
       </p:sp>
@@ -1927,7 +2219,9 @@
           <a:bodyPr/>
           <a:lstStyle/>
           <a:p>
-            <a:endParaRPr lang="en-US" dirty="0"/>
+            <a:r>
+              <a:t>POCO: само данни, без логика. ToString() override.</a:t>
+            </a:r>
           </a:p>
         </p:txBody>
       </p:sp>
@@ -2087,7 +2381,9 @@
           <a:bodyPr/>
           <a:lstStyle/>
           <a:p>
-            <a:endParaRPr lang="en-US" dirty="0"/>
+            <a:r>
+              <a:t>Бизнес слоя: валидация, бизнес правила, кеширане, логване.</a:t>
+            </a:r>
           </a:p>
         </p:txBody>
       </p:sp>
@@ -2196,6 +2492,146 @@
         <p14:creationId xmlns:p14="http://schemas.microsoft.com/office/powerpoint/2010/main" val="1053823368"/>
       </p:ext>
     </p:extLst>
+  </p:cSld>
+  <p:clrMapOvr>
+    <a:masterClrMapping/>
+  </p:clrMapOvr>
+</p:notes>
+</file>
+
+<file path=ppt/notesSlides/notesSlide8.xml><?xml version="1.0" encoding="utf-8"?>
+<p:notes xmlns:a="http://schemas.openxmlformats.org/drawingml/2006/main" xmlns:p="http://schemas.openxmlformats.org/presentationml/2006/main" xmlns:r="http://schemas.openxmlformats.org/officeDocument/2006/relationships">
+  <p:cSld>
+    <p:spTree>
+      <p:nvGrpSpPr>
+        <p:cNvPr id="1" name=""/>
+        <p:cNvGrpSpPr/>
+        <p:nvPr/>
+      </p:nvGrpSpPr>
+      <p:grpSpPr>
+        <a:xfrm>
+          <a:off x="0" y="0"/>
+          <a:ext cx="0" cy="0"/>
+          <a:chOff x="0" y="0"/>
+          <a:chExt cx="0" cy="0"/>
+        </a:xfrm>
+      </p:grpSpPr>
+      <p:sp>
+        <p:nvSpPr>
+          <p:cNvPr id="2" name="Slide Image Placeholder 1"/>
+          <p:cNvSpPr>
+            <a:spLocks noGrp="1"/>
+          </p:cNvSpPr>
+          <p:nvPr>
+            <p:ph type="sldImg" idx="2"/>
+          </p:nvPr>
+        </p:nvSpPr>
+        <p:spPr/>
+      </p:sp>
+      <p:sp>
+        <p:nvSpPr>
+          <p:cNvPr id="3" name="Notes Placeholder 2"/>
+          <p:cNvSpPr>
+            <a:spLocks noGrp="1"/>
+          </p:cNvSpPr>
+          <p:nvPr>
+            <p:ph type="body" idx="3" sz="quarter"/>
+          </p:nvPr>
+        </p:nvSpPr>
+        <p:spPr/>
+        <p:txBody>
+          <a:bodyPr/>
+          <a:lstStyle/>
+          <a:p>
+            <a:r>
+              <a:t>Имплементираме всички 4 CRUD операции с ADO.NET.</a:t>
+            </a:r>
+          </a:p>
+        </p:txBody>
+      </p:sp>
+      <p:sp>
+        <p:nvSpPr>
+          <p:cNvPr id="4" name="Slide Number Placeholder 3"/>
+          <p:cNvSpPr>
+            <a:spLocks noGrp="1"/>
+          </p:cNvSpPr>
+          <p:nvPr>
+            <p:ph type="sldNum" idx="5" sz="quarter"/>
+          </p:nvPr>
+        </p:nvSpPr>
+        <p:spPr/>
+      </p:sp>
+    </p:spTree>
+  </p:cSld>
+  <p:clrMapOvr>
+    <a:masterClrMapping/>
+  </p:clrMapOvr>
+</p:notes>
+</file>
+
+<file path=ppt/notesSlides/notesSlide9.xml><?xml version="1.0" encoding="utf-8"?>
+<p:notes xmlns:a="http://schemas.openxmlformats.org/drawingml/2006/main" xmlns:p="http://schemas.openxmlformats.org/presentationml/2006/main" xmlns:r="http://schemas.openxmlformats.org/officeDocument/2006/relationships">
+  <p:cSld>
+    <p:spTree>
+      <p:nvGrpSpPr>
+        <p:cNvPr id="1" name=""/>
+        <p:cNvGrpSpPr/>
+        <p:nvPr/>
+      </p:nvGrpSpPr>
+      <p:grpSpPr>
+        <a:xfrm>
+          <a:off x="0" y="0"/>
+          <a:ext cx="0" cy="0"/>
+          <a:chOff x="0" y="0"/>
+          <a:chExt cx="0" cy="0"/>
+        </a:xfrm>
+      </p:grpSpPr>
+      <p:sp>
+        <p:nvSpPr>
+          <p:cNvPr id="2" name="Slide Image Placeholder 1"/>
+          <p:cNvSpPr>
+            <a:spLocks noGrp="1"/>
+          </p:cNvSpPr>
+          <p:nvPr>
+            <p:ph type="sldImg" idx="2"/>
+          </p:nvPr>
+        </p:nvSpPr>
+        <p:spPr/>
+      </p:sp>
+      <p:sp>
+        <p:nvSpPr>
+          <p:cNvPr id="3" name="Notes Placeholder 2"/>
+          <p:cNvSpPr>
+            <a:spLocks noGrp="1"/>
+          </p:cNvSpPr>
+          <p:nvPr>
+            <p:ph type="body" idx="3" sz="quarter"/>
+          </p:nvPr>
+        </p:nvSpPr>
+        <p:spPr/>
+        <p:txBody>
+          <a:bodyPr/>
+          <a:lstStyle/>
+          <a:p>
+            <a:r>
+              <a:t>CRUD. Функционално приложение за управление на продукти.</a:t>
+            </a:r>
+          </a:p>
+        </p:txBody>
+      </p:sp>
+      <p:sp>
+        <p:nvSpPr>
+          <p:cNvPr id="4" name="Slide Number Placeholder 3"/>
+          <p:cNvSpPr>
+            <a:spLocks noGrp="1"/>
+          </p:cNvSpPr>
+          <p:nvPr>
+            <p:ph type="sldNum" idx="5" sz="quarter"/>
+          </p:nvPr>
+        </p:nvSpPr>
+        <p:spPr/>
+      </p:sp>
+    </p:spTree>
   </p:cSld>
   <p:clrMapOvr>
     <a:masterClrMapping/>
@@ -7301,6 +7737,176 @@
         <p14:creationId xmlns:p14="http://schemas.microsoft.com/office/powerpoint/2010/main" val="1241344677"/>
       </p:ext>
     </p:extLst>
+  </p:cSld>
+  <p:clrMapOvr>
+    <a:masterClrMapping/>
+  </p:clrMapOvr>
+</p:sld>
+</file>
+
+<file path=ppt/slides/slide15.xml><?xml version="1.0" encoding="utf-8"?>
+<p:sld xmlns:a="http://schemas.openxmlformats.org/drawingml/2006/main" xmlns:p="http://schemas.openxmlformats.org/presentationml/2006/main" xmlns:r="http://schemas.openxmlformats.org/officeDocument/2006/relationships">
+  <p:cSld>
+    <p:spTree>
+      <p:nvGrpSpPr>
+        <p:cNvPr id="1" name=""/>
+        <p:cNvGrpSpPr/>
+        <p:nvPr/>
+      </p:nvGrpSpPr>
+      <p:grpSpPr/>
+      <p:sp>
+        <p:nvSpPr>
+          <p:cNvPr id="2" name="Title 1"/>
+          <p:cNvSpPr>
+            <a:spLocks noGrp="1"/>
+          </p:cNvSpPr>
+          <p:nvPr>
+            <p:ph type="title"/>
+          </p:nvPr>
+        </p:nvSpPr>
+        <p:spPr/>
+        <p:txBody>
+          <a:bodyPr/>
+          <a:lstStyle/>
+          <a:p>
+            <a:r>
+              <a:t>Защо трислойна архитектура?</a:t>
+            </a:r>
+          </a:p>
+        </p:txBody>
+      </p:sp>
+      <p:sp>
+        <p:nvSpPr>
+          <p:cNvPr id="3" name="Content Placeholder 2"/>
+          <p:cNvSpPr>
+            <a:spLocks noGrp="1"/>
+          </p:cNvSpPr>
+          <p:nvPr>
+            <p:ph idx="1"/>
+          </p:nvPr>
+        </p:nvSpPr>
+        <p:spPr/>
+        <p:txBody>
+          <a:bodyPr/>
+          <a:lstStyle/>
+          <a:p>
+            <a:r>
+              <a:t>Data слой: знае SQL, не знае UI</a:t>
+            </a:r>
+          </a:p>
+          <a:p>
+            <a:r>
+              <a:t>Business слой: знае логика, не знае SQL</a:t>
+            </a:r>
+          </a:p>
+          <a:p>
+            <a:r>
+              <a:t>Presentation слой: знае UI, не знае SQL</a:t>
+            </a:r>
+          </a:p>
+          <a:p>
+            <a:r>
+              <a:t>Смяна SQL Server с MySQL: само Data слоят</a:t>
+            </a:r>
+          </a:p>
+          <a:p>
+            <a:r>
+              <a:t>Добавяне уеб UI: само Presentation</a:t>
+            </a:r>
+          </a:p>
+          <a:p>
+            <a:r>
+              <a:t>Ново правило: само Business слоя</a:t>
+            </a:r>
+          </a:p>
+        </p:txBody>
+      </p:sp>
+    </p:spTree>
+  </p:cSld>
+  <p:clrMapOvr>
+    <a:masterClrMapping/>
+  </p:clrMapOvr>
+</p:sld>
+</file>
+
+<file path=ppt/slides/slide16.xml><?xml version="1.0" encoding="utf-8"?>
+<p:sld xmlns:a="http://schemas.openxmlformats.org/drawingml/2006/main" xmlns:p="http://schemas.openxmlformats.org/presentationml/2006/main" xmlns:r="http://schemas.openxmlformats.org/officeDocument/2006/relationships">
+  <p:cSld>
+    <p:spTree>
+      <p:nvGrpSpPr>
+        <p:cNvPr id="1" name=""/>
+        <p:cNvGrpSpPr/>
+        <p:nvPr/>
+      </p:nvGrpSpPr>
+      <p:grpSpPr/>
+      <p:sp>
+        <p:nvSpPr>
+          <p:cNvPr id="2" name="Title 1"/>
+          <p:cNvSpPr>
+            <a:spLocks noGrp="1"/>
+          </p:cNvSpPr>
+          <p:nvPr>
+            <p:ph type="title"/>
+          </p:nvPr>
+        </p:nvSpPr>
+        <p:spPr/>
+        <p:txBody>
+          <a:bodyPr/>
+          <a:lstStyle/>
+          <a:p>
+            <a:r>
+              <a:t>ADO.NET CRUD — Резюме</a:t>
+            </a:r>
+          </a:p>
+        </p:txBody>
+      </p:sp>
+      <p:sp>
+        <p:nvSpPr>
+          <p:cNvPr id="3" name="Content Placeholder 2"/>
+          <p:cNvSpPr>
+            <a:spLocks noGrp="1"/>
+          </p:cNvSpPr>
+          <p:nvPr>
+            <p:ph idx="1"/>
+          </p:nvPr>
+        </p:nvSpPr>
+        <p:spPr/>
+        <p:txBody>
+          <a:bodyPr/>
+          <a:lstStyle/>
+          <a:p>
+            <a:r>
+              <a:t>GetAll(): SELECT * → ExecuteReader() → while(Read())</a:t>
+            </a:r>
+          </a:p>
+          <a:p>
+            <a:r>
+              <a:t>Get(id): SELECT WHERE @id → Read() → Product или null</a:t>
+            </a:r>
+          </a:p>
+          <a:p>
+            <a:r>
+              <a:t>Add(p): INSERT VALUES (@p1,...) → ExecuteNonQuery()</a:t>
+            </a:r>
+          </a:p>
+          <a:p>
+            <a:r>
+              <a:t>Update(p): UPDATE SET ... WHERE @id → ExecuteNonQuery()</a:t>
+            </a:r>
+          </a:p>
+          <a:p>
+            <a:r>
+              <a:t>Delete(id): DELETE WHERE @id → ExecuteNonQuery()</a:t>
+            </a:r>
+          </a:p>
+          <a:p>
+            <a:r>
+              <a:t>ВИНАГИ: using(GetConnection()), conn.Open(), @параметри!</a:t>
+            </a:r>
+          </a:p>
+        </p:txBody>
+      </p:sp>
+    </p:spTree>
   </p:cSld>
   <p:clrMapOvr>
     <a:masterClrMapping/>
